--- a/docs/GradeGuardian_Defense_Slides.pptx
+++ b/docs/GradeGuardian_Defense_Slides.pptx
@@ -2228,7 +2228,7 @@
         <p:spPr>
           <a:xfrm>
             <a:off x="1371600" y="3886200"/>
-            <a:ext cx="6400800" cy="365760"/>
+            <a:ext cx="6400800" cy="731520"/>
           </a:xfrm>
           <a:prstGeom prst="rect">
             <a:avLst/>
@@ -2252,7 +2252,24 @@
                 <a:ea typeface="Calibri" pitchFamily="34" charset="-122"/>
                 <a:cs typeface="Calibri" pitchFamily="34" charset="-120"/>
               </a:rPr>
-              <a:t>Richard Yawlui  ·  Department of Computer Science  ·  July 2026</a:t>
+              <a:t>Richard Yawlui — 4211231018  ·  Addo Foster Keteku — 4211231161</a:t>
+            </a:r>
+            <a:endParaRPr lang="en-US" sz="1400" dirty="0"/>
+          </a:p>
+          <a:p>
+            <a:pPr algn="ctr" indent="0" marL="0">
+              <a:buNone/>
+            </a:pPr>
+            <a:r>
+              <a:rPr lang="en-US" sz="1400" dirty="0">
+                <a:solidFill>
+                  <a:srgbClr val="8A91A8"/>
+                </a:solidFill>
+                <a:latin typeface="Calibri" pitchFamily="34" charset="0"/>
+                <a:ea typeface="Calibri" pitchFamily="34" charset="-122"/>
+                <a:cs typeface="Calibri" pitchFamily="34" charset="-120"/>
+              </a:rPr>
+              <a:t>Department of Computer Science  ·  July 2026</a:t>
             </a:r>
             <a:endParaRPr lang="en-US" sz="1400" dirty="0"/>
           </a:p>
